--- a/media/resources/files/Onduktar_Akcha_Bolup_Toloo_menen_XjanaO.pptx
+++ b/media/resources/files/Onduktar_Akcha_Bolup_Toloo_menen_XjanaO.pptx
@@ -8947,7 +8947,7 @@
                 <a:ea typeface="+mn-ea"/>
                 <a:cs typeface="+mn-cs"/>
               </a:rPr>
-              <a:t>Турдуу пикирлер учун ыраазычылык билдиребиз.</a:t>
+              <a:t>Түрдүү пикирлер үчүн ыраазычылык билдиребиз.</a:t>
             </a:r>
           </a:p>
           <a:p>

--- a/media/resources/files/Onduktar_Akcha_Bolup_Toloo_menen_XjanaO.pptx
+++ b/media/resources/files/Onduktar_Akcha_Bolup_Toloo_menen_XjanaO.pptx
@@ -3959,7 +3959,7 @@
                 <a:ea typeface="+mn-ea"/>
                 <a:cs typeface="Arial" panose="020B0604020202020204" pitchFamily="34" charset="0"/>
               </a:rPr>
-              <a:t>Мугалим үчүн жооп баракчасы жана таратма материалдар камтылган.</a:t>
+              <a:t>Мугалим үчүн жооп барагы жана таратма материалдар бар.</a:t>
             </a:r>
           </a:p>
           <a:p>
@@ -4028,7 +4028,7 @@
                 <a:ea typeface="+mn-ea"/>
                 <a:cs typeface="Arial" panose="020B0604020202020204" pitchFamily="34" charset="0"/>
               </a:rPr>
-              <a:t>Кайсы команда туура жооп бергенине жараша '</a:t>
+              <a:t>Туура жооп берген командага жараша «</a:t>
             </a:r>
             <a:r>
               <a:rPr kumimoji="0" lang="en-GB" sz="2000" b="0" i="0" u="sng" strike="noStrike" kern="1200" cap="none" spc="0" normalizeH="0" baseline="0" noProof="0" dirty="0">
@@ -4045,7 +4045,7 @@
                 <a:ea typeface="+mn-ea"/>
                 <a:cs typeface="Arial" panose="020B0604020202020204" pitchFamily="34" charset="0"/>
               </a:rPr>
-              <a:t>X' </a:t>
+              <a:t>X» </a:t>
             </a:r>
             <a:r>
               <a:rPr kumimoji="0" lang="ru-RU" sz="2000" b="0" i="0" u="sng" strike="noStrike" kern="1200" cap="none" spc="0" normalizeH="0" baseline="0" noProof="0" dirty="0">
@@ -4062,7 +4062,7 @@
                 <a:ea typeface="+mn-ea"/>
                 <a:cs typeface="Arial" panose="020B0604020202020204" pitchFamily="34" charset="0"/>
               </a:rPr>
-              <a:t>же '</a:t>
+              <a:t>же «</a:t>
             </a:r>
             <a:r>
               <a:rPr kumimoji="0" lang="en-GB" sz="2000" b="0" i="0" u="sng" strike="noStrike" kern="1200" cap="none" spc="0" normalizeH="0" baseline="0" noProof="0" dirty="0">
@@ -4079,7 +4079,7 @@
                 <a:ea typeface="+mn-ea"/>
                 <a:cs typeface="Arial" panose="020B0604020202020204" pitchFamily="34" charset="0"/>
               </a:rPr>
-              <a:t>O' </a:t>
+              <a:t>O» </a:t>
             </a:r>
             <a:r>
               <a:rPr kumimoji="0" lang="ru-RU" sz="2000" b="0" i="0" u="sng" strike="noStrike" kern="1200" cap="none" spc="0" normalizeH="0" baseline="0" noProof="0" dirty="0">
@@ -4096,7 +4096,7 @@
                 <a:ea typeface="+mn-ea"/>
                 <a:cs typeface="Arial" panose="020B0604020202020204" pitchFamily="34" charset="0"/>
               </a:rPr>
-              <a:t>баскычын басыңыз/тийип коюңуз</a:t>
+              <a:t>баскычын басыңыз</a:t>
             </a:r>
             <a:r>
               <a:rPr kumimoji="0" lang="en-GB" sz="2000" b="0" i="0" u="none" strike="noStrike" kern="1200" cap="none" spc="0" normalizeH="0" baseline="0" noProof="0" dirty="0">
@@ -4829,7 +4829,7 @@
             </a:pPr>
             <a:r>
               <a:rPr lang="ky-KG" sz="2200" dirty="0"/>
-              <a:t>Бардыгы = 55884.58 с</a:t>
+              <a:t>Бардыгы = 55884,58 с</a:t>
             </a:r>
             <a:endParaRPr lang="en-GB" sz="2200" dirty="0"/>
           </a:p>
@@ -5216,7 +5216,7 @@
             </a:pPr>
             <a:r>
               <a:rPr lang="ky-KG" sz="2200" dirty="0"/>
-              <a:t>Бардыгы = 68,184 сом</a:t>
+              <a:t>Бардыгы = 68 184 сом</a:t>
             </a:r>
             <a:endParaRPr lang="en-GB" sz="2200" dirty="0"/>
           </a:p>

--- a/media/resources/files/Onduktar_Akcha_Bolup_Toloo_menen_XjanaO.pptx
+++ b/media/resources/files/Onduktar_Akcha_Bolup_Toloo_menen_XjanaO.pptx
@@ -4723,7 +4723,7 @@
             </a:pPr>
             <a:r>
               <a:rPr lang="ky-KG" sz="2200" dirty="0"/>
-              <a:t>12295 сом депозит</a:t>
+              <a:t>12 295 сом депозит</a:t>
             </a:r>
           </a:p>
           <a:p>
@@ -4757,7 +4757,7 @@
             </a:pPr>
             <a:r>
               <a:rPr lang="ky-KG" sz="2200" dirty="0"/>
-              <a:t>Бардыгы = 14995 сом</a:t>
+              <a:t>Бардыгы = 14 995 сом</a:t>
             </a:r>
             <a:endParaRPr lang="en-GB" sz="2200" dirty="0"/>
           </a:p>
@@ -4829,7 +4829,7 @@
             </a:pPr>
             <a:r>
               <a:rPr lang="ky-KG" sz="2200" dirty="0"/>
-              <a:t>Бардыгы = 55884,58 с</a:t>
+              <a:t>Бардыгы = 55 884,58 с</a:t>
             </a:r>
             <a:endParaRPr lang="en-GB" sz="2200" dirty="0"/>
           </a:p>
@@ -4904,7 +4904,7 @@
             </a:pPr>
             <a:r>
               <a:rPr lang="ky-KG" sz="2200" dirty="0"/>
-              <a:t>Бардыгы = 36335 сом</a:t>
+              <a:t>Бардыгы = 36 335 сом</a:t>
             </a:r>
             <a:endParaRPr lang="en-GB" sz="2200" dirty="0"/>
           </a:p>
@@ -4945,7 +4945,7 @@
             </a:pPr>
             <a:r>
               <a:rPr lang="ky-KG" sz="2200" dirty="0"/>
-              <a:t>10060 сом депозит</a:t>
+              <a:t>10 060 сом депозит</a:t>
             </a:r>
           </a:p>
           <a:p>
@@ -5024,7 +5024,7 @@
             </a:pPr>
             <a:r>
               <a:rPr lang="ky-KG" sz="2200" dirty="0"/>
-              <a:t>16765</a:t>
+              <a:t>16 765</a:t>
             </a:r>
             <a:r>
               <a:rPr lang="en-US" sz="2200" dirty="0"/>
@@ -5066,7 +5066,7 @@
             </a:pPr>
             <a:r>
               <a:rPr lang="ky-KG" sz="2200" dirty="0"/>
-              <a:t>Бардыгы = 157525 сом</a:t>
+              <a:t>Бардыгы = 157 525 сом</a:t>
             </a:r>
             <a:endParaRPr lang="en-GB" sz="2200" dirty="0"/>
           </a:p>
@@ -5141,7 +5141,7 @@
             </a:pPr>
             <a:r>
               <a:rPr lang="ky-KG" sz="2200" dirty="0"/>
-              <a:t>Бардыгы = 187772 сом</a:t>
+              <a:t>Бардыгы = 187 772 сом</a:t>
             </a:r>
             <a:endParaRPr lang="en-GB" sz="2200" dirty="0"/>
           </a:p>
